--- a/ADG/14장/14장_Broker모니터링과검증명령.pptx
+++ b/ADG/14장/14장_Broker모니터링과검증명령.pptx
@@ -53,6 +53,12 @@
     <p:sldId id="301" r:id="rId53"/>
     <p:sldId id="302" r:id="rId54"/>
     <p:sldId id="303" r:id="rId55"/>
+    <p:sldId id="304" r:id="rId56"/>
+    <p:sldId id="305" r:id="rId57"/>
+    <p:sldId id="306" r:id="rId58"/>
+    <p:sldId id="307" r:id="rId59"/>
+    <p:sldId id="308" r:id="rId60"/>
+    <p:sldId id="309" r:id="rId61"/>
   </p:sldIdLst>
   <p:sldSz cx="12191695" cy="6858000" type="screen4x3"/>
   <p:notesSz cx="6858000" cy="9144000"/>
@@ -2439,7 +2445,7 @@
           <a:lstStyle/>
           <a:p>
             <a:r>
-              <a:t>1~3층은 SQL 이나 DGMGRL 한 줄로 끝나므로 자동화한다. 4층은 사람이 읽어야 할 항목이 많으므로 정기 점검에 넣는다. 5층은 사건이 났을 때만 본다. 층마다 답하는 질문이 다르므로 어느 하나로 다른 것을 대신할 수 없다. 특히 1층의 SUCCESS 는 4층의 답을 대신하지 못한다는 것이 이 장 전체의 결론이다. 층마다 답하는 질문이 다르므로 어느 하나로 다른 것을 대신할 수 없다. 특히 1층의 SUCCESS 는 4층의 답을 대신하지 못한다.</a:t>
+              <a:t>1~3층은 SQL 이나 DGMGRL 한 줄로 끝나므로 자동화한다. 4층은 사람이 읽어야 할 항목이 많으므로 정기 점검에 넣는다. 5층은 사건이 났을 때만 본다. 층마다 답하는 질문이 다르므로 어느 하나로 다른 것을 대신할 수 없다. 특히 1층의 SUCCESS 는 4층의 답을 대신하지 못한다는 것이 이 장 전체의 결론이다. 그래서 4층을 자동화하기 어렵더라도 최소한 Ready for Switchover 한 줄은 뽑아 두어야 한다.</a:t>
             </a:r>
           </a:p>
         </p:txBody>
@@ -2604,6 +2610,216 @@
 </p:notes>
 </file>
 
+<file path=ppt/notesSlides/notesSlide37.xml><?xml version="1.0" encoding="utf-8"?>
+<p:notes xmlns:a="http://schemas.openxmlformats.org/drawingml/2006/main" xmlns:p="http://schemas.openxmlformats.org/presentationml/2006/main" xmlns:r="http://schemas.openxmlformats.org/officeDocument/2006/relationships">
+  <p:cSld>
+    <p:spTree>
+      <p:nvGrpSpPr>
+        <p:cNvPr id="1" name=""/>
+        <p:cNvGrpSpPr/>
+        <p:nvPr/>
+      </p:nvGrpSpPr>
+      <p:grpSpPr>
+        <a:xfrm>
+          <a:off x="0" y="0"/>
+          <a:ext cx="0" cy="0"/>
+          <a:chOff x="0" y="0"/>
+          <a:chExt cx="0" cy="0"/>
+        </a:xfrm>
+      </p:grpSpPr>
+      <p:sp>
+        <p:nvSpPr>
+          <p:cNvPr id="2" name="Slide Image Placeholder 1"/>
+          <p:cNvSpPr>
+            <a:spLocks noGrp="1"/>
+          </p:cNvSpPr>
+          <p:nvPr>
+            <p:ph type="sldImg" idx="2"/>
+          </p:nvPr>
+        </p:nvSpPr>
+        <p:spPr/>
+      </p:sp>
+      <p:sp>
+        <p:nvSpPr>
+          <p:cNvPr id="3" name="Notes Placeholder 2"/>
+          <p:cNvSpPr>
+            <a:spLocks noGrp="1"/>
+          </p:cNvSpPr>
+          <p:nvPr>
+            <p:ph type="body" idx="3" sz="quarter"/>
+          </p:nvPr>
+        </p:nvSpPr>
+        <p:spPr/>
+        <p:txBody>
+          <a:bodyPr/>
+          <a:lstStyle/>
+          <a:p>
+            <a:r>
+              <a:t>실습 01 에서 쓴 것은 첫 번째뿐이었다. DATAFILE 은 OUTPUT= 이 대괄호 밖에 있어 필수이며 빠뜨리면 Syntax error 다. 그리고 경로를 주면 DGM-17138 로 거부된다. 14.6절의 EXPORT CONFIGURATION 이 ORA-16540 을 낸 것과 같은 구조이며 인자는 경로가 아니라 파일 이름이다. 오류 접두어가 ORA- 가 아니라 DGM- 이라는 점도 판정 스크립트를 짤 때 기억한다.</a:t>
+            </a:r>
+          </a:p>
+        </p:txBody>
+      </p:sp>
+      <p:sp>
+        <p:nvSpPr>
+          <p:cNvPr id="4" name="Slide Number Placeholder 3"/>
+          <p:cNvSpPr>
+            <a:spLocks noGrp="1"/>
+          </p:cNvSpPr>
+          <p:nvPr>
+            <p:ph type="sldNum" idx="5" sz="quarter"/>
+          </p:nvPr>
+        </p:nvSpPr>
+        <p:spPr/>
+      </p:sp>
+    </p:spTree>
+  </p:cSld>
+  <p:clrMapOvr>
+    <a:masterClrMapping/>
+  </p:clrMapOvr>
+</p:notes>
+</file>
+
+<file path=ppt/notesSlides/notesSlide38.xml><?xml version="1.0" encoding="utf-8"?>
+<p:notes xmlns:a="http://schemas.openxmlformats.org/drawingml/2006/main" xmlns:p="http://schemas.openxmlformats.org/presentationml/2006/main" xmlns:r="http://schemas.openxmlformats.org/officeDocument/2006/relationships">
+  <p:cSld>
+    <p:spTree>
+      <p:nvGrpSpPr>
+        <p:cNvPr id="1" name=""/>
+        <p:cNvGrpSpPr/>
+        <p:nvPr/>
+      </p:nvGrpSpPr>
+      <p:grpSpPr>
+        <a:xfrm>
+          <a:off x="0" y="0"/>
+          <a:ext cx="0" cy="0"/>
+          <a:chOff x="0" y="0"/>
+          <a:chExt cx="0" cy="0"/>
+        </a:xfrm>
+      </p:grpSpPr>
+      <p:sp>
+        <p:nvSpPr>
+          <p:cNvPr id="2" name="Slide Image Placeholder 1"/>
+          <p:cNvSpPr>
+            <a:spLocks noGrp="1"/>
+          </p:cNvSpPr>
+          <p:nvPr>
+            <p:ph type="sldImg" idx="2"/>
+          </p:nvPr>
+        </p:nvSpPr>
+        <p:spPr/>
+      </p:sp>
+      <p:sp>
+        <p:nvSpPr>
+          <p:cNvPr id="3" name="Notes Placeholder 2"/>
+          <p:cNvSpPr>
+            <a:spLocks noGrp="1"/>
+          </p:cNvSpPr>
+          <p:nvPr>
+            <p:ph type="body" idx="3" sz="quarter"/>
+          </p:nvPr>
+        </p:nvSpPr>
+        <p:spPr/>
+        <p:txBody>
+          <a:bodyPr/>
+          <a:lstStyle/>
+          <a:p>
+            <a:r>
+              <a:t>명령은 Primary 에서 냈는데 결과물은 대상 쪽에 생긴다. 검사를 대상 데이터베이스가 수행하기 때문이며 14.6절의 EXPORT 와 다르므로 명령마다 확인한다. lost write 는 전송과 적용이 정상인데도 데이터가 조용히 어긋나는 사고이며 지연이나 시퀀스로는 드러나지 않는다. 15장에서 만들 점검표로도 잡히지 않고 이 명령만이 잡는다. 실측에서 CORR 와 lost write 는 모두 0 이었다.</a:t>
+            </a:r>
+          </a:p>
+        </p:txBody>
+      </p:sp>
+      <p:sp>
+        <p:nvSpPr>
+          <p:cNvPr id="4" name="Slide Number Placeholder 3"/>
+          <p:cNvSpPr>
+            <a:spLocks noGrp="1"/>
+          </p:cNvSpPr>
+          <p:nvPr>
+            <p:ph type="sldNum" idx="5" sz="quarter"/>
+          </p:nvPr>
+        </p:nvSpPr>
+        <p:spPr/>
+      </p:sp>
+    </p:spTree>
+  </p:cSld>
+  <p:clrMapOvr>
+    <a:masterClrMapping/>
+  </p:clrMapOvr>
+</p:notes>
+</file>
+
+<file path=ppt/notesSlides/notesSlide39.xml><?xml version="1.0" encoding="utf-8"?>
+<p:notes xmlns:a="http://schemas.openxmlformats.org/drawingml/2006/main" xmlns:p="http://schemas.openxmlformats.org/presentationml/2006/main" xmlns:r="http://schemas.openxmlformats.org/officeDocument/2006/relationships">
+  <p:cSld>
+    <p:spTree>
+      <p:nvGrpSpPr>
+        <p:cNvPr id="1" name=""/>
+        <p:cNvGrpSpPr/>
+        <p:nvPr/>
+      </p:nvGrpSpPr>
+      <p:grpSpPr>
+        <a:xfrm>
+          <a:off x="0" y="0"/>
+          <a:ext cx="0" cy="0"/>
+          <a:chOff x="0" y="0"/>
+          <a:chExt cx="0" cy="0"/>
+        </a:xfrm>
+      </p:grpSpPr>
+      <p:sp>
+        <p:nvSpPr>
+          <p:cNvPr id="2" name="Slide Image Placeholder 1"/>
+          <p:cNvSpPr>
+            <a:spLocks noGrp="1"/>
+          </p:cNvSpPr>
+          <p:nvPr>
+            <p:ph type="sldImg" idx="2"/>
+          </p:nvPr>
+        </p:nvSpPr>
+        <p:spPr/>
+      </p:sp>
+      <p:sp>
+        <p:nvSpPr>
+          <p:cNvPr id="3" name="Notes Placeholder 2"/>
+          <p:cNvSpPr>
+            <a:spLocks noGrp="1"/>
+          </p:cNvSpPr>
+          <p:nvPr>
+            <p:ph type="body" idx="3" sz="quarter"/>
+          </p:nvPr>
+        </p:nvSpPr>
+        <p:spPr/>
+        <p:txBody>
+          <a:bodyPr/>
+          <a:lstStyle/>
+          <a:p>
+            <a:r>
+              <a:t>log_archive_trace 가 흥미롭다. 15장에서 chicago 에만 추적을 켰다가 0 으로 되돌리는데 그때 SCOPE=BOTH 로 저장되면서 명시적으로 0 이 된다. boston 은 한 번도 건드리지 않아 NOT SPECIFIED 다. 값은 사실상 같은데 표기가 다르며, 14.6절에서 본 XML 의 Default 표시와 같은 이야기다. 한 번 설정하면 기본값과 같아도 설정한 것으로 남는다.</a:t>
+            </a:r>
+          </a:p>
+        </p:txBody>
+      </p:sp>
+      <p:sp>
+        <p:nvSpPr>
+          <p:cNvPr id="4" name="Slide Number Placeholder 3"/>
+          <p:cNvSpPr>
+            <a:spLocks noGrp="1"/>
+          </p:cNvSpPr>
+          <p:nvPr>
+            <p:ph type="sldNum" idx="5" sz="quarter"/>
+          </p:nvPr>
+        </p:nvSpPr>
+        <p:spPr/>
+      </p:sp>
+    </p:spTree>
+  </p:cSld>
+  <p:clrMapOvr>
+    <a:masterClrMapping/>
+  </p:clrMapOvr>
+</p:notes>
+</file>
+
 <file path=ppt/notesSlides/notesSlide4.xml><?xml version="1.0" encoding="utf-8"?>
 <p:notes xmlns:a="http://schemas.openxmlformats.org/drawingml/2006/main" xmlns:p="http://schemas.openxmlformats.org/presentationml/2006/main" xmlns:r="http://schemas.openxmlformats.org/officeDocument/2006/relationships">
   <p:cSld>
@@ -2650,6 +2866,146 @@
           <a:p>
             <a:r>
               <a:t>이 차이가 진단에 쓰인다. RESET 이 보이면 Broker 가 껐다는 뜻이고 DEFER 가 보이면 사람이 SQL 로 껐다는 뜻이다. 후자라면 13장에서 배운 대로 Broker 가 관리하는 것을 SQL 로 바꾼 상황이므로 다른 문제까지 의심해야 한다. 파라미터 값의 표현 차이가 곧 정보다. 실측에서 파라미터는 RESET 인데 목적지 상태는 DEFERRED 로 표시됐다. 같은 사실을 두 곳에서 다르게 표현하므로 둘을 함께 읽는 습관이 필요하다.</a:t>
+            </a:r>
+          </a:p>
+        </p:txBody>
+      </p:sp>
+      <p:sp>
+        <p:nvSpPr>
+          <p:cNvPr id="4" name="Slide Number Placeholder 3"/>
+          <p:cNvSpPr>
+            <a:spLocks noGrp="1"/>
+          </p:cNvSpPr>
+          <p:nvPr>
+            <p:ph type="sldNum" idx="5" sz="quarter"/>
+          </p:nvPr>
+        </p:nvSpPr>
+        <p:spPr/>
+      </p:sp>
+    </p:spTree>
+  </p:cSld>
+  <p:clrMapOvr>
+    <a:masterClrMapping/>
+  </p:clrMapOvr>
+</p:notes>
+</file>
+
+<file path=ppt/notesSlides/notesSlide40.xml><?xml version="1.0" encoding="utf-8"?>
+<p:notes xmlns:a="http://schemas.openxmlformats.org/drawingml/2006/main" xmlns:p="http://schemas.openxmlformats.org/presentationml/2006/main" xmlns:r="http://schemas.openxmlformats.org/officeDocument/2006/relationships">
+  <p:cSld>
+    <p:spTree>
+      <p:nvGrpSpPr>
+        <p:cNvPr id="1" name=""/>
+        <p:cNvGrpSpPr/>
+        <p:nvPr/>
+      </p:nvGrpSpPr>
+      <p:grpSpPr>
+        <a:xfrm>
+          <a:off x="0" y="0"/>
+          <a:ext cx="0" cy="0"/>
+          <a:chOff x="0" y="0"/>
+          <a:chExt cx="0" cy="0"/>
+        </a:xfrm>
+      </p:grpSpPr>
+      <p:sp>
+        <p:nvSpPr>
+          <p:cNvPr id="2" name="Slide Image Placeholder 1"/>
+          <p:cNvSpPr>
+            <a:spLocks noGrp="1"/>
+          </p:cNvSpPr>
+          <p:nvPr>
+            <p:ph type="sldImg" idx="2"/>
+          </p:nvPr>
+        </p:nvSpPr>
+        <p:spPr/>
+      </p:sp>
+      <p:sp>
+        <p:nvSpPr>
+          <p:cNvPr id="3" name="Notes Placeholder 2"/>
+          <p:cNvSpPr>
+            <a:spLocks noGrp="1"/>
+          </p:cNvSpPr>
+          <p:nvPr>
+            <p:ph type="body" idx="3" sz="quarter"/>
+          </p:nvPr>
+        </p:nvSpPr>
+        <p:spPr/>
+        <p:txBody>
+          <a:bodyPr/>
+          <a:lstStyle/>
+          <a:p>
+            <a:r>
+              <a:t>출력에 이유가 있다. VALIDATE DATABASE 는 Primary 의 정적 등록만 시험하고 대상의 것은 검사하지 않는다. 그런데 16장의 전환 과정은 대상 쪽 정적 등록을 쓰므로 지금 전환하면 New primary is opening 다음에서 멈춘다. 이 장은 SHOW 가 SUCCESS 라고 안전한 것이 아니라는 데서 출발했는데, VALIDATE 가 Yes 라고 전환이 된다는 보장도 아니라는 데까지 온다.</a:t>
+            </a:r>
+          </a:p>
+        </p:txBody>
+      </p:sp>
+      <p:sp>
+        <p:nvSpPr>
+          <p:cNvPr id="4" name="Slide Number Placeholder 3"/>
+          <p:cNvSpPr>
+            <a:spLocks noGrp="1"/>
+          </p:cNvSpPr>
+          <p:nvPr>
+            <p:ph type="sldNum" idx="5" sz="quarter"/>
+          </p:nvPr>
+        </p:nvSpPr>
+        <p:spPr/>
+      </p:sp>
+    </p:spTree>
+  </p:cSld>
+  <p:clrMapOvr>
+    <a:masterClrMapping/>
+  </p:clrMapOvr>
+</p:notes>
+</file>
+
+<file path=ppt/notesSlides/notesSlide41.xml><?xml version="1.0" encoding="utf-8"?>
+<p:notes xmlns:a="http://schemas.openxmlformats.org/drawingml/2006/main" xmlns:p="http://schemas.openxmlformats.org/presentationml/2006/main" xmlns:r="http://schemas.openxmlformats.org/officeDocument/2006/relationships">
+  <p:cSld>
+    <p:spTree>
+      <p:nvGrpSpPr>
+        <p:cNvPr id="1" name=""/>
+        <p:cNvGrpSpPr/>
+        <p:nvPr/>
+      </p:nvGrpSpPr>
+      <p:grpSpPr>
+        <a:xfrm>
+          <a:off x="0" y="0"/>
+          <a:ext cx="0" cy="0"/>
+          <a:chOff x="0" y="0"/>
+          <a:chExt cx="0" cy="0"/>
+        </a:xfrm>
+      </p:grpSpPr>
+      <p:sp>
+        <p:nvSpPr>
+          <p:cNvPr id="2" name="Slide Image Placeholder 1"/>
+          <p:cNvSpPr>
+            <a:spLocks noGrp="1"/>
+          </p:cNvSpPr>
+          <p:nvPr>
+            <p:ph type="sldImg" idx="2"/>
+          </p:nvPr>
+        </p:nvSpPr>
+        <p:spPr/>
+      </p:sp>
+      <p:sp>
+        <p:nvSpPr>
+          <p:cNvPr id="3" name="Notes Placeholder 2"/>
+          <p:cNvSpPr>
+            <a:spLocks noGrp="1"/>
+          </p:cNvSpPr>
+          <p:nvPr>
+            <p:ph type="body" idx="3" sz="quarter"/>
+          </p:nvPr>
+        </p:nvSpPr>
+        <p:spPr/>
+        <p:txBody>
+          <a:bodyPr/>
+          <a:lstStyle/>
+          <a:p>
+            <a:r>
+              <a:t>화면은 SUCCESS·WARNING·ERROR 라는 낱말만 보여 주므로 자동 판정에는 로그 쪽이 쓰기 좋다. IncarnationTable 은 우리가 실행한 적 없는 명령인데 Broker 가 스스로 실행한 것이며, 16장에서 Failover 로 인큐네이션이 바뀐 뒤 그 이력을 기록한 것이다. 값 안의 숫자가 16장에서 볼 RESETLOGS_CHANGE# 와 같다. 화면은 지금을, 로그는 그동안을 보여 준다.</a:t>
             </a:r>
           </a:p>
         </p:txBody>
@@ -15902,7 +16258,7 @@
         <p:spPr>
           <a:xfrm>
             <a:off x="0" y="0"/>
-            <a:ext cx="12191695" cy="1005840"/>
+            <a:ext cx="12191695" cy="6858000"/>
           </a:xfrm>
           <a:prstGeom prst="rect">
             <a:avLst/>
@@ -15945,8 +16301,8 @@
         </p:nvSpPr>
         <p:spPr>
           <a:xfrm>
-            <a:off x="548640" y="91440"/>
-            <a:ext cx="10972800" cy="777240"/>
+            <a:off x="822960" y="2011680"/>
+            <a:ext cx="10515600" cy="1097280"/>
           </a:xfrm>
           <a:prstGeom prst="rect">
             <a:avLst/>
@@ -15965,13 +16321,13 @@
               </a:spcAft>
             </a:pPr>
             <a:r>
-              <a:rPr sz="2600" b="1">
+              <a:rPr sz="4000" b="1">
                 <a:solidFill>
                   <a:srgbClr val="FFFFFF"/>
                 </a:solidFill>
                 <a:latin typeface="맑은 고딕"/>
               </a:rPr>
-              <a:t>요약</a:t>
+              <a:t>14.12</a:t>
             </a:r>
           </a:p>
         </p:txBody>
@@ -15984,8 +16340,8 @@
         </p:nvSpPr>
         <p:spPr>
           <a:xfrm>
-            <a:off x="640080" y="1371600"/>
-            <a:ext cx="10881360" cy="5120640"/>
+            <a:off x="822960" y="3017520"/>
+            <a:ext cx="10515600" cy="914400"/>
           </a:xfrm>
           <a:prstGeom prst="rect">
             <a:avLst/>
@@ -16000,177 +16356,116 @@
           <a:p>
             <a:pPr algn="l">
               <a:spcAft>
-                <a:spcPts val="1000"/>
+                <a:spcPts val="600"/>
+              </a:spcAft>
+            </a:pPr>
+            <a:r>
+              <a:rPr sz="2800" b="1">
+                <a:solidFill>
+                  <a:srgbClr val="FFFFFF"/>
+                </a:solidFill>
+                <a:latin typeface="맑은 고딕"/>
+              </a:rPr>
+              <a:t>VALIDATE 의 나머지 형태와 Broker 로그</a:t>
+            </a:r>
+          </a:p>
+        </p:txBody>
+      </p:sp>
+      <p:sp>
+        <p:nvSpPr>
+          <p:cNvPr id="5" name="Rectangle 4"/>
+          <p:cNvSpPr/>
+          <p:nvPr/>
+        </p:nvSpPr>
+        <p:spPr>
+          <a:xfrm>
+            <a:off x="822960" y="4114800"/>
+            <a:ext cx="5486400" cy="54864"/>
+          </a:xfrm>
+          <a:prstGeom prst="rect">
+            <a:avLst/>
+          </a:prstGeom>
+          <a:solidFill>
+            <a:srgbClr val="FFFFFF"/>
+          </a:solidFill>
+          <a:ln>
+            <a:noFill/>
+          </a:ln>
+          <a:effectLst/>
+        </p:spPr>
+        <p:style>
+          <a:lnRef idx="1">
+            <a:schemeClr val="accent1"/>
+          </a:lnRef>
+          <a:fillRef idx="3">
+            <a:schemeClr val="accent1"/>
+          </a:fillRef>
+          <a:effectRef idx="2">
+            <a:schemeClr val="accent1"/>
+          </a:effectRef>
+          <a:fontRef idx="minor">
+            <a:schemeClr val="lt1"/>
+          </a:fontRef>
+        </p:style>
+        <p:txBody>
+          <a:bodyPr rtlCol="0" anchor="ctr"/>
+          <a:lstStyle/>
+          <a:p>
+            <a:pPr algn="ctr"/>
+          </a:p>
+        </p:txBody>
+      </p:sp>
+      <p:sp>
+        <p:nvSpPr>
+          <p:cNvPr id="6" name="TextBox 5"/>
+          <p:cNvSpPr txBox="1"/>
+          <p:nvPr/>
+        </p:nvSpPr>
+        <p:spPr>
+          <a:xfrm>
+            <a:off x="822960" y="4297680"/>
+            <a:ext cx="10058400" cy="2011680"/>
+          </a:xfrm>
+          <a:prstGeom prst="rect">
+            <a:avLst/>
+          </a:prstGeom>
+          <a:noFill/>
+        </p:spPr>
+        <p:txBody>
+          <a:bodyPr wrap="square">
+            <a:spAutoFit/>
+          </a:bodyPr>
+          <a:lstStyle/>
+          <a:p>
+            <a:pPr algn="l">
+              <a:spcAft>
+                <a:spcPts val="800"/>
               </a:spcAft>
             </a:pPr>
             <a:r>
               <a:rPr sz="1600" b="0">
                 <a:solidFill>
-                  <a:srgbClr val="222222"/>
-                </a:solidFill>
-                <a:latin typeface="맑은 고딕"/>
-              </a:rPr>
-              <a:t>•  `SHOW` 는 "의도대로인가", `VALIDATE` 는 "전환할 수 있는가"</a:t>
-            </a:r>
-          </a:p>
-          <a:p>
-            <a:pPr algn="l">
-              <a:spcAft>
-                <a:spcPts val="1000"/>
+                  <a:srgbClr val="FFFFFF"/>
+                </a:solidFill>
+                <a:latin typeface="맑은 고딕"/>
+              </a:rPr>
+              <a:t>•  여섯 구문을 모두 쓴다</a:t>
+            </a:r>
+          </a:p>
+          <a:p>
+            <a:pPr algn="l">
+              <a:spcAft>
+                <a:spcPts val="800"/>
               </a:spcAft>
             </a:pPr>
             <a:r>
               <a:rPr sz="1600" b="0">
                 <a:solidFill>
-                  <a:srgbClr val="222222"/>
-                </a:solidFill>
-                <a:latin typeface="맑은 고딕"/>
-              </a:rPr>
-              <a:t>•  실측 — `LogShipping=OFF` 인데 `SUCCESS`, 두 지연도 0</a:t>
-            </a:r>
-          </a:p>
-          <a:p>
-            <a:pPr algn="l">
-              <a:spcAft>
-                <a:spcPts val="1000"/>
-              </a:spcAft>
-            </a:pPr>
-            <a:r>
-              <a:rPr sz="1600" b="0">
-                <a:solidFill>
-                  <a:srgbClr val="222222"/>
-                </a:solidFill>
-                <a:latin typeface="맑은 고딕"/>
-              </a:rPr>
-              <a:t>•  Broker 는 `DEFER` 가 아니라 **`RESET`** 을 쓴다</a:t>
-            </a:r>
-          </a:p>
-          <a:p>
-            <a:pPr algn="l">
-              <a:spcAft>
-                <a:spcPts val="1000"/>
-              </a:spcAft>
-            </a:pPr>
-            <a:r>
-              <a:rPr sz="1600" b="0">
-                <a:solidFill>
-                  <a:srgbClr val="222222"/>
-                </a:solidFill>
-                <a:latin typeface="맑은 고딕"/>
-              </a:rPr>
-              <a:t>•  `VERBOSE` 는 `Future` 구성까지 계산한다</a:t>
-            </a:r>
-          </a:p>
-          <a:p>
-            <a:pPr algn="l">
-              <a:spcAft>
-                <a:spcPts val="1000"/>
-              </a:spcAft>
-            </a:pPr>
-            <a:r>
-              <a:rPr sz="1600" b="0">
-                <a:solidFill>
-                  <a:srgbClr val="222222"/>
-                </a:solidFill>
-                <a:latin typeface="맑은 고딕"/>
-              </a:rPr>
-              <a:t>•  임계값 셋은 기본 30초 — ORA-16853·16855·16857</a:t>
-            </a:r>
-          </a:p>
-          <a:p>
-            <a:pPr algn="l">
-              <a:spcAft>
-                <a:spcPts val="1000"/>
-              </a:spcAft>
-            </a:pPr>
-            <a:r>
-              <a:rPr sz="1600" b="0">
-                <a:solidFill>
-                  <a:srgbClr val="222222"/>
-                </a:solidFill>
-                <a:latin typeface="맑은 고딕"/>
-              </a:rPr>
-              <a:t>•  **임계값이 있는 항목만 경보한다**</a:t>
-            </a:r>
-          </a:p>
-          <a:p>
-            <a:pPr algn="l">
-              <a:spcAft>
-                <a:spcPts val="1000"/>
-              </a:spcAft>
-            </a:pPr>
-            <a:r>
-              <a:rPr sz="1600" b="0">
-                <a:solidFill>
-                  <a:srgbClr val="222222"/>
-                </a:solidFill>
-                <a:latin typeface="맑은 고딕"/>
-              </a:rPr>
-              <a:t>•  `EXPORT` 는 trace 디렉터리. 경로를 주면 ORA-16540</a:t>
-            </a:r>
-          </a:p>
-          <a:p>
-            <a:pPr algn="l">
-              <a:spcAft>
-                <a:spcPts val="1000"/>
-              </a:spcAft>
-            </a:pPr>
-            <a:r>
-              <a:rPr sz="1600" b="0">
-                <a:solidFill>
-                  <a:srgbClr val="222222"/>
-                </a:solidFill>
-                <a:latin typeface="맑은 고딕"/>
-              </a:rPr>
-              <a:t>•  `IMPORT` 는 구성이 있으면 ORA-16504</a:t>
-            </a:r>
-          </a:p>
-          <a:p>
-            <a:pPr algn="l">
-              <a:spcAft>
-                <a:spcPts val="1000"/>
-              </a:spcAft>
-            </a:pPr>
-            <a:r>
-              <a:rPr sz="1600" b="0">
-                <a:solidFill>
-                  <a:srgbClr val="222222"/>
-                </a:solidFill>
-                <a:latin typeface="맑은 고딕"/>
-              </a:rPr>
-              <a:t>•  FSFO 는 전제 없이도 경고만 하고 켜진다 (ORA-16827)</a:t>
-            </a:r>
-          </a:p>
-          <a:p>
-            <a:pPr algn="l">
-              <a:spcAft>
-                <a:spcPts val="1000"/>
-              </a:spcAft>
-            </a:pPr>
-            <a:r>
-              <a:rPr sz="1600" b="0">
-                <a:solidFill>
-                  <a:srgbClr val="222222"/>
-                </a:solidFill>
-                <a:latin typeface="맑은 고딕"/>
-              </a:rPr>
-              <a:t>•  끌 때는 **`DISABLE` 이 먼저**</a:t>
-            </a:r>
-          </a:p>
-          <a:p>
-            <a:pPr algn="l">
-              <a:spcAft>
-                <a:spcPts val="1000"/>
-              </a:spcAft>
-            </a:pPr>
-            <a:r>
-              <a:rPr sz="1600" b="0">
-                <a:solidFill>
-                  <a:srgbClr val="222222"/>
-                </a:solidFill>
-                <a:latin typeface="맑은 고딕"/>
-              </a:rPr>
-              <a:t>•  감시 다섯 층 중 **4층을 빠뜨리는 것이 가장 흔한 실수**</a:t>
+                  <a:srgbClr val="FFFFFF"/>
+                </a:solidFill>
+                <a:latin typeface="맑은 고딕"/>
+              </a:rPr>
+              <a:t>•  검사하지 않는 것이 있다</a:t>
             </a:r>
           </a:p>
         </p:txBody>
@@ -16271,7 +16566,7 @@
                 </a:solidFill>
                 <a:latin typeface="맑은 고딕"/>
               </a:rPr>
-              <a:t>다음 장 예고</a:t>
+              <a:t>VALIDATE 는 여섯 구문</a:t>
             </a:r>
           </a:p>
         </p:txBody>
@@ -16284,8 +16579,8 @@
         </p:nvSpPr>
         <p:spPr>
           <a:xfrm>
-            <a:off x="640080" y="1371600"/>
-            <a:ext cx="10881360" cy="5120640"/>
+            <a:off x="640080" y="1078992"/>
+            <a:ext cx="10881360" cy="457200"/>
           </a:xfrm>
           <a:prstGeom prst="rect">
             <a:avLst/>
@@ -16300,65 +16595,331 @@
           <a:p>
             <a:pPr algn="l">
               <a:spcAft>
-                <a:spcPts val="1000"/>
-              </a:spcAft>
-            </a:pPr>
-            <a:r>
-              <a:rPr sz="1600" b="0">
-                <a:solidFill>
-                  <a:srgbClr val="222222"/>
-                </a:solidFill>
-                <a:latin typeface="맑은 고딕"/>
-              </a:rPr>
-              <a:t>•  15장 — V$ 뷰 기반 모니터링과 문제 해결</a:t>
-            </a:r>
-          </a:p>
-          <a:p>
-            <a:pPr algn="l">
-              <a:spcAft>
-                <a:spcPts val="1000"/>
-              </a:spcAft>
-            </a:pPr>
-            <a:r>
-              <a:rPr sz="1600" b="0">
-                <a:solidFill>
-                  <a:srgbClr val="222222"/>
-                </a:solidFill>
-                <a:latin typeface="맑은 고딕"/>
-              </a:rPr>
-              <a:t>•  Broker 없이 SQL 만으로 진단하는 방법</a:t>
-            </a:r>
-          </a:p>
-          <a:p>
-            <a:pPr algn="l">
-              <a:spcAft>
-                <a:spcPts val="1000"/>
-              </a:spcAft>
-            </a:pPr>
-            <a:r>
-              <a:rPr sz="1600" b="0">
-                <a:solidFill>
-                  <a:srgbClr val="222222"/>
-                </a:solidFill>
-                <a:latin typeface="맑은 고딕"/>
-              </a:rPr>
-              <a:t>•  갭·성능·공간 문제의 절차화</a:t>
-            </a:r>
-          </a:p>
-          <a:p>
-            <a:pPr algn="l">
-              <a:spcAft>
-                <a:spcPts val="1000"/>
-              </a:spcAft>
-            </a:pPr>
-            <a:r>
-              <a:rPr sz="1600" b="0">
-                <a:solidFill>
-                  <a:srgbClr val="222222"/>
-                </a:solidFill>
-                <a:latin typeface="맑은 고딕"/>
-              </a:rPr>
-              <a:t>•  이 장에서 본 뷰들을 실제 장애 상황에 적용한다</a:t>
+                <a:spcPts val="600"/>
+              </a:spcAft>
+            </a:pPr>
+            <a:r>
+              <a:rPr sz="1500" b="0">
+                <a:solidFill>
+                  <a:srgbClr val="5A6672"/>
+                </a:solidFill>
+                <a:latin typeface="맑은 고딕"/>
+              </a:rPr>
+              <a:t>하나만 써 왔다</a:t>
+            </a:r>
+          </a:p>
+        </p:txBody>
+      </p:sp>
+      <p:sp>
+        <p:nvSpPr>
+          <p:cNvPr id="5" name="TextBox 4"/>
+          <p:cNvSpPr txBox="1"/>
+          <p:nvPr/>
+        </p:nvSpPr>
+        <p:spPr>
+          <a:xfrm>
+            <a:off x="640080" y="1737360"/>
+            <a:ext cx="10881360" cy="4754880"/>
+          </a:xfrm>
+          <a:prstGeom prst="rect">
+            <a:avLst/>
+          </a:prstGeom>
+          <a:noFill/>
+        </p:spPr>
+        <p:txBody>
+          <a:bodyPr wrap="square">
+            <a:spAutoFit/>
+          </a:bodyPr>
+          <a:lstStyle/>
+          <a:p>
+            <a:pPr algn="l">
+              <a:spcAft>
+                <a:spcPts val="1000"/>
+              </a:spcAft>
+            </a:pPr>
+            <a:r>
+              <a:rPr sz="1700" b="0">
+                <a:solidFill>
+                  <a:srgbClr val="222222"/>
+                </a:solidFill>
+                <a:latin typeface="맑은 고딕"/>
+              </a:rPr>
+              <a:t>•  `DATABASE [VERBOSE]` / `... DATAFILE &lt;n&gt; OUTPUT=&lt;file&gt;`</a:t>
+            </a:r>
+          </a:p>
+          <a:p>
+            <a:pPr algn="l">
+              <a:spcAft>
+                <a:spcPts val="1000"/>
+              </a:spcAft>
+            </a:pPr>
+            <a:r>
+              <a:rPr sz="1700" b="0">
+                <a:solidFill>
+                  <a:srgbClr val="222222"/>
+                </a:solidFill>
+                <a:latin typeface="맑은 고딕"/>
+              </a:rPr>
+              <a:t>•  `... SPFILE` / `FAR_SYNC` (10장)</a:t>
+            </a:r>
+          </a:p>
+          <a:p>
+            <a:pPr algn="l">
+              <a:spcAft>
+                <a:spcPts val="1000"/>
+              </a:spcAft>
+            </a:pPr>
+            <a:r>
+              <a:rPr sz="1700" b="0">
+                <a:solidFill>
+                  <a:srgbClr val="222222"/>
+                </a:solidFill>
+                <a:latin typeface="맑은 고딕"/>
+              </a:rPr>
+              <a:t>•  `NETWORK CONFIGURATION FOR { ALL | &lt;member&gt; }`</a:t>
+            </a:r>
+          </a:p>
+          <a:p>
+            <a:pPr algn="l">
+              <a:spcAft>
+                <a:spcPts val="1000"/>
+              </a:spcAft>
+            </a:pPr>
+            <a:r>
+              <a:rPr sz="1700" b="0">
+                <a:solidFill>
+                  <a:srgbClr val="222222"/>
+                </a:solidFill>
+                <a:latin typeface="맑은 고딕"/>
+              </a:rPr>
+              <a:t>•  `STATIC CONNECT IDENTIFIER FOR { ALL | &lt;database&gt; }`</a:t>
+            </a:r>
+          </a:p>
+        </p:txBody>
+      </p:sp>
+    </p:spTree>
+  </p:cSld>
+  <p:clrMapOvr>
+    <a:masterClrMapping/>
+  </p:clrMapOvr>
+</p:sld>
+</file>
+
+<file path=ppt/slides/slide49.xml><?xml version="1.0" encoding="utf-8"?>
+<p:sld xmlns:a="http://schemas.openxmlformats.org/drawingml/2006/main" xmlns:p="http://schemas.openxmlformats.org/presentationml/2006/main" xmlns:r="http://schemas.openxmlformats.org/officeDocument/2006/relationships">
+  <p:cSld>
+    <p:spTree>
+      <p:nvGrpSpPr>
+        <p:cNvPr id="1" name=""/>
+        <p:cNvGrpSpPr/>
+        <p:nvPr/>
+      </p:nvGrpSpPr>
+      <p:grpSpPr/>
+      <p:sp>
+        <p:nvSpPr>
+          <p:cNvPr id="2" name="Rectangle 1"/>
+          <p:cNvSpPr/>
+          <p:nvPr/>
+        </p:nvSpPr>
+        <p:spPr>
+          <a:xfrm>
+            <a:off x="0" y="0"/>
+            <a:ext cx="12191695" cy="1005840"/>
+          </a:xfrm>
+          <a:prstGeom prst="rect">
+            <a:avLst/>
+          </a:prstGeom>
+          <a:solidFill>
+            <a:srgbClr val="C0392B"/>
+          </a:solidFill>
+          <a:ln>
+            <a:noFill/>
+          </a:ln>
+          <a:effectLst/>
+        </p:spPr>
+        <p:style>
+          <a:lnRef idx="1">
+            <a:schemeClr val="accent1"/>
+          </a:lnRef>
+          <a:fillRef idx="3">
+            <a:schemeClr val="accent1"/>
+          </a:fillRef>
+          <a:effectRef idx="2">
+            <a:schemeClr val="accent1"/>
+          </a:effectRef>
+          <a:fontRef idx="minor">
+            <a:schemeClr val="lt1"/>
+          </a:fontRef>
+        </p:style>
+        <p:txBody>
+          <a:bodyPr rtlCol="0" anchor="ctr"/>
+          <a:lstStyle/>
+          <a:p>
+            <a:pPr algn="ctr"/>
+          </a:p>
+        </p:txBody>
+      </p:sp>
+      <p:sp>
+        <p:nvSpPr>
+          <p:cNvPr id="3" name="TextBox 2"/>
+          <p:cNvSpPr txBox="1"/>
+          <p:nvPr/>
+        </p:nvSpPr>
+        <p:spPr>
+          <a:xfrm>
+            <a:off x="548640" y="91440"/>
+            <a:ext cx="10972800" cy="777240"/>
+          </a:xfrm>
+          <a:prstGeom prst="rect">
+            <a:avLst/>
+          </a:prstGeom>
+          <a:noFill/>
+        </p:spPr>
+        <p:txBody>
+          <a:bodyPr wrap="square">
+            <a:spAutoFit/>
+          </a:bodyPr>
+          <a:lstStyle/>
+          <a:p>
+            <a:pPr algn="l">
+              <a:spcAft>
+                <a:spcPts val="600"/>
+              </a:spcAft>
+            </a:pPr>
+            <a:r>
+              <a:rPr sz="2600" b="1">
+                <a:solidFill>
+                  <a:srgbClr val="FFFFFF"/>
+                </a:solidFill>
+                <a:latin typeface="맑은 고딕"/>
+              </a:rPr>
+              <a:t>DATAFILE 은 블록을 비교한다</a:t>
+            </a:r>
+          </a:p>
+        </p:txBody>
+      </p:sp>
+      <p:sp>
+        <p:nvSpPr>
+          <p:cNvPr id="4" name="TextBox 3"/>
+          <p:cNvSpPr txBox="1"/>
+          <p:nvPr/>
+        </p:nvSpPr>
+        <p:spPr>
+          <a:xfrm>
+            <a:off x="640080" y="1078992"/>
+            <a:ext cx="10881360" cy="457200"/>
+          </a:xfrm>
+          <a:prstGeom prst="rect">
+            <a:avLst/>
+          </a:prstGeom>
+          <a:noFill/>
+        </p:spPr>
+        <p:txBody>
+          <a:bodyPr wrap="square">
+            <a:spAutoFit/>
+          </a:bodyPr>
+          <a:lstStyle/>
+          <a:p>
+            <a:pPr algn="l">
+              <a:spcAft>
+                <a:spcPts val="600"/>
+              </a:spcAft>
+            </a:pPr>
+            <a:r>
+              <a:rPr sz="1500" b="0">
+                <a:solidFill>
+                  <a:srgbClr val="5A6672"/>
+                </a:solidFill>
+                <a:latin typeface="맑은 고딕"/>
+              </a:rPr>
+              <a:t>5장의 그 엔진</a:t>
+            </a:r>
+          </a:p>
+        </p:txBody>
+      </p:sp>
+      <p:sp>
+        <p:nvSpPr>
+          <p:cNvPr id="5" name="TextBox 4"/>
+          <p:cNvSpPr txBox="1"/>
+          <p:nvPr/>
+        </p:nvSpPr>
+        <p:spPr>
+          <a:xfrm>
+            <a:off x="640080" y="1737360"/>
+            <a:ext cx="10881360" cy="4754880"/>
+          </a:xfrm>
+          <a:prstGeom prst="rect">
+            <a:avLst/>
+          </a:prstGeom>
+          <a:noFill/>
+        </p:spPr>
+        <p:txBody>
+          <a:bodyPr wrap="square">
+            <a:spAutoFit/>
+          </a:bodyPr>
+          <a:lstStyle/>
+          <a:p>
+            <a:pPr algn="l">
+              <a:spcAft>
+                <a:spcPts val="1000"/>
+              </a:spcAft>
+            </a:pPr>
+            <a:r>
+              <a:rPr sz="1700" b="0">
+                <a:solidFill>
+                  <a:srgbClr val="222222"/>
+                </a:solidFill>
+                <a:latin typeface="맑은 고딕"/>
+              </a:rPr>
+              <a:t>•  결과물은 **대상(Standby) 쪽 trace** 에 생긴다</a:t>
+            </a:r>
+          </a:p>
+          <a:p>
+            <a:pPr algn="l">
+              <a:spcAft>
+                <a:spcPts val="1000"/>
+              </a:spcAft>
+            </a:pPr>
+            <a:r>
+              <a:rPr sz="1700" b="0">
+                <a:solidFill>
+                  <a:srgbClr val="222222"/>
+                </a:solidFill>
+                <a:latin typeface="맑은 고딕"/>
+              </a:rPr>
+              <a:t>•  내용은 5장 실습 07 의 **`DBMS_DBCOMP`** 비교 결과</a:t>
+            </a:r>
+          </a:p>
+          <a:p>
+            <a:pPr algn="l">
+              <a:spcAft>
+                <a:spcPts val="1000"/>
+              </a:spcAft>
+            </a:pPr>
+            <a:r>
+              <a:rPr sz="1700" b="0">
+                <a:solidFill>
+                  <a:srgbClr val="222222"/>
+                </a:solidFill>
+                <a:latin typeface="맑은 고딕"/>
+              </a:rPr>
+              <a:t>•  `CORR`·`LWLOC`·`LWRMT`·`DIFFPAIR` 가 **0** 이어야 한다</a:t>
+            </a:r>
+          </a:p>
+          <a:p>
+            <a:pPr algn="l">
+              <a:spcAft>
+                <a:spcPts val="1000"/>
+              </a:spcAft>
+            </a:pPr>
+            <a:r>
+              <a:rPr sz="1700" b="0">
+                <a:solidFill>
+                  <a:srgbClr val="222222"/>
+                </a:solidFill>
+                <a:latin typeface="맑은 고딕"/>
+              </a:rPr>
+              <a:t>•  없는 파일 번호 → **ORA-53201** + `SYS.DBMS_DBCOMP` 스택</a:t>
             </a:r>
           </a:p>
         </p:txBody>
@@ -16586,6 +17147,1207 @@
                 <a:latin typeface="맑은 고딕"/>
               </a:rPr>
               <a:t>•  세 번째만 미래를 묻는다</a:t>
+            </a:r>
+          </a:p>
+        </p:txBody>
+      </p:sp>
+    </p:spTree>
+  </p:cSld>
+  <p:clrMapOvr>
+    <a:masterClrMapping/>
+  </p:clrMapOvr>
+</p:sld>
+</file>
+
+<file path=ppt/slides/slide50.xml><?xml version="1.0" encoding="utf-8"?>
+<p:sld xmlns:a="http://schemas.openxmlformats.org/drawingml/2006/main" xmlns:p="http://schemas.openxmlformats.org/presentationml/2006/main" xmlns:r="http://schemas.openxmlformats.org/officeDocument/2006/relationships">
+  <p:cSld>
+    <p:spTree>
+      <p:nvGrpSpPr>
+        <p:cNvPr id="1" name=""/>
+        <p:cNvGrpSpPr/>
+        <p:nvPr/>
+      </p:nvGrpSpPr>
+      <p:grpSpPr/>
+      <p:sp>
+        <p:nvSpPr>
+          <p:cNvPr id="2" name="Rectangle 1"/>
+          <p:cNvSpPr/>
+          <p:nvPr/>
+        </p:nvSpPr>
+        <p:spPr>
+          <a:xfrm>
+            <a:off x="0" y="0"/>
+            <a:ext cx="12191695" cy="1005840"/>
+          </a:xfrm>
+          <a:prstGeom prst="rect">
+            <a:avLst/>
+          </a:prstGeom>
+          <a:solidFill>
+            <a:srgbClr val="C0392B"/>
+          </a:solidFill>
+          <a:ln>
+            <a:noFill/>
+          </a:ln>
+          <a:effectLst/>
+        </p:spPr>
+        <p:style>
+          <a:lnRef idx="1">
+            <a:schemeClr val="accent1"/>
+          </a:lnRef>
+          <a:fillRef idx="3">
+            <a:schemeClr val="accent1"/>
+          </a:fillRef>
+          <a:effectRef idx="2">
+            <a:schemeClr val="accent1"/>
+          </a:effectRef>
+          <a:fontRef idx="minor">
+            <a:schemeClr val="lt1"/>
+          </a:fontRef>
+        </p:style>
+        <p:txBody>
+          <a:bodyPr rtlCol="0" anchor="ctr"/>
+          <a:lstStyle/>
+          <a:p>
+            <a:pPr algn="ctr"/>
+          </a:p>
+        </p:txBody>
+      </p:sp>
+      <p:sp>
+        <p:nvSpPr>
+          <p:cNvPr id="3" name="TextBox 2"/>
+          <p:cNvSpPr txBox="1"/>
+          <p:nvPr/>
+        </p:nvSpPr>
+        <p:spPr>
+          <a:xfrm>
+            <a:off x="548640" y="91440"/>
+            <a:ext cx="10972800" cy="777240"/>
+          </a:xfrm>
+          <a:prstGeom prst="rect">
+            <a:avLst/>
+          </a:prstGeom>
+          <a:noFill/>
+        </p:spPr>
+        <p:txBody>
+          <a:bodyPr wrap="square">
+            <a:spAutoFit/>
+          </a:bodyPr>
+          <a:lstStyle/>
+          <a:p>
+            <a:pPr algn="l">
+              <a:spcAft>
+                <a:spcPts val="600"/>
+              </a:spcAft>
+            </a:pPr>
+            <a:r>
+              <a:rPr sz="2600" b="1">
+                <a:solidFill>
+                  <a:srgbClr val="FFFFFF"/>
+                </a:solidFill>
+                <a:latin typeface="맑은 고딕"/>
+              </a:rPr>
+              <a:t>SPFILE 은 파라미터를 비교한다</a:t>
+            </a:r>
+          </a:p>
+        </p:txBody>
+      </p:sp>
+      <p:sp>
+        <p:nvSpPr>
+          <p:cNvPr id="4" name="TextBox 3"/>
+          <p:cNvSpPr txBox="1"/>
+          <p:nvPr/>
+        </p:nvSpPr>
+        <p:spPr>
+          <a:xfrm>
+            <a:off x="640080" y="1078992"/>
+            <a:ext cx="10881360" cy="457200"/>
+          </a:xfrm>
+          <a:prstGeom prst="rect">
+            <a:avLst/>
+          </a:prstGeom>
+          <a:noFill/>
+        </p:spPr>
+        <p:txBody>
+          <a:bodyPr wrap="square">
+            <a:spAutoFit/>
+          </a:bodyPr>
+          <a:lstStyle/>
+          <a:p>
+            <a:pPr algn="l">
+              <a:spcAft>
+                <a:spcPts val="600"/>
+              </a:spcAft>
+            </a:pPr>
+            <a:r>
+              <a:rPr sz="1500" b="0">
+                <a:solidFill>
+                  <a:srgbClr val="5A6672"/>
+                </a:solidFill>
+                <a:latin typeface="맑은 고딕"/>
+              </a:rPr>
+              <a:t>실측 4개 차이</a:t>
+            </a:r>
+          </a:p>
+        </p:txBody>
+      </p:sp>
+      <p:sp>
+        <p:nvSpPr>
+          <p:cNvPr id="5" name="TextBox 4"/>
+          <p:cNvSpPr txBox="1"/>
+          <p:nvPr/>
+        </p:nvSpPr>
+        <p:spPr>
+          <a:xfrm>
+            <a:off x="640080" y="1737360"/>
+            <a:ext cx="10881360" cy="4754880"/>
+          </a:xfrm>
+          <a:prstGeom prst="rect">
+            <a:avLst/>
+          </a:prstGeom>
+          <a:noFill/>
+        </p:spPr>
+        <p:txBody>
+          <a:bodyPr wrap="square">
+            <a:spAutoFit/>
+          </a:bodyPr>
+          <a:lstStyle/>
+          <a:p>
+            <a:pPr algn="l">
+              <a:spcAft>
+                <a:spcPts val="1000"/>
+              </a:spcAft>
+            </a:pPr>
+            <a:r>
+              <a:rPr sz="1700" b="0">
+                <a:solidFill>
+                  <a:srgbClr val="222222"/>
+                </a:solidFill>
+                <a:latin typeface="맑은 고딕"/>
+              </a:rPr>
+              <a:t>•  `audit_file_dest` / `fal_client` — 다른 것이 **정상**</a:t>
+            </a:r>
+          </a:p>
+          <a:p>
+            <a:pPr algn="l">
+              <a:spcAft>
+                <a:spcPts val="1000"/>
+              </a:spcAft>
+            </a:pPr>
+            <a:r>
+              <a:rPr sz="1700" b="0">
+                <a:solidFill>
+                  <a:srgbClr val="222222"/>
+                </a:solidFill>
+                <a:latin typeface="맑은 고딕"/>
+              </a:rPr>
+              <a:t>•  `diagnostic_dest` — **끝의 슬래시 하나** 차이</a:t>
+            </a:r>
+          </a:p>
+          <a:p>
+            <a:pPr algn="l">
+              <a:spcAft>
+                <a:spcPts val="1000"/>
+              </a:spcAft>
+            </a:pPr>
+            <a:r>
+              <a:rPr sz="1700" b="0">
+                <a:solidFill>
+                  <a:srgbClr val="222222"/>
+                </a:solidFill>
+                <a:latin typeface="맑은 고딕"/>
+              </a:rPr>
+              <a:t>•  `log_archive_trace` — chicago `0` / boston `NOT SPECIFIED`</a:t>
+            </a:r>
+          </a:p>
+          <a:p>
+            <a:pPr algn="l">
+              <a:spcAft>
+                <a:spcPts val="1000"/>
+              </a:spcAft>
+            </a:pPr>
+            <a:r>
+              <a:rPr sz="1700" b="0">
+                <a:solidFill>
+                  <a:srgbClr val="222222"/>
+                </a:solidFill>
+                <a:latin typeface="맑은 고딕"/>
+              </a:rPr>
+              <a:t>•  전부 고치는 것이 아니라 **읽고 판정하는 것**이 목적</a:t>
+            </a:r>
+          </a:p>
+        </p:txBody>
+      </p:sp>
+    </p:spTree>
+  </p:cSld>
+  <p:clrMapOvr>
+    <a:masterClrMapping/>
+  </p:clrMapOvr>
+</p:sld>
+</file>
+
+<file path=ppt/slides/slide51.xml><?xml version="1.0" encoding="utf-8"?>
+<p:sld xmlns:a="http://schemas.openxmlformats.org/drawingml/2006/main" xmlns:p="http://schemas.openxmlformats.org/presentationml/2006/main" xmlns:r="http://schemas.openxmlformats.org/officeDocument/2006/relationships">
+  <p:cSld>
+    <p:spTree>
+      <p:nvGrpSpPr>
+        <p:cNvPr id="1" name=""/>
+        <p:cNvGrpSpPr/>
+        <p:nvPr/>
+      </p:nvGrpSpPr>
+      <p:grpSpPr/>
+      <p:sp>
+        <p:nvSpPr>
+          <p:cNvPr id="2" name="Rectangle 1"/>
+          <p:cNvSpPr/>
+          <p:nvPr/>
+        </p:nvSpPr>
+        <p:spPr>
+          <a:xfrm>
+            <a:off x="0" y="0"/>
+            <a:ext cx="12191695" cy="1005840"/>
+          </a:xfrm>
+          <a:prstGeom prst="rect">
+            <a:avLst/>
+          </a:prstGeom>
+          <a:solidFill>
+            <a:srgbClr val="C0392B"/>
+          </a:solidFill>
+          <a:ln>
+            <a:noFill/>
+          </a:ln>
+          <a:effectLst/>
+        </p:spPr>
+        <p:style>
+          <a:lnRef idx="1">
+            <a:schemeClr val="accent1"/>
+          </a:lnRef>
+          <a:fillRef idx="3">
+            <a:schemeClr val="accent1"/>
+          </a:fillRef>
+          <a:effectRef idx="2">
+            <a:schemeClr val="accent1"/>
+          </a:effectRef>
+          <a:fontRef idx="minor">
+            <a:schemeClr val="lt1"/>
+          </a:fontRef>
+        </p:style>
+        <p:txBody>
+          <a:bodyPr rtlCol="0" anchor="ctr"/>
+          <a:lstStyle/>
+          <a:p>
+            <a:pPr algn="ctr"/>
+          </a:p>
+        </p:txBody>
+      </p:sp>
+      <p:sp>
+        <p:nvSpPr>
+          <p:cNvPr id="3" name="TextBox 2"/>
+          <p:cNvSpPr txBox="1"/>
+          <p:nvPr/>
+        </p:nvSpPr>
+        <p:spPr>
+          <a:xfrm>
+            <a:off x="548640" y="91440"/>
+            <a:ext cx="10972800" cy="777240"/>
+          </a:xfrm>
+          <a:prstGeom prst="rect">
+            <a:avLst/>
+          </a:prstGeom>
+          <a:noFill/>
+        </p:spPr>
+        <p:txBody>
+          <a:bodyPr wrap="square">
+            <a:spAutoFit/>
+          </a:bodyPr>
+          <a:lstStyle/>
+          <a:p>
+            <a:pPr algn="l">
+              <a:spcAft>
+                <a:spcPts val="600"/>
+              </a:spcAft>
+            </a:pPr>
+            <a:r>
+              <a:rPr sz="2600" b="1">
+                <a:solidFill>
+                  <a:srgbClr val="FFFFFF"/>
+                </a:solidFill>
+                <a:latin typeface="맑은 고딕"/>
+              </a:rPr>
+              <a:t>★ VALIDATE 가 검사하지 않는 것</a:t>
+            </a:r>
+          </a:p>
+        </p:txBody>
+      </p:sp>
+      <p:sp>
+        <p:nvSpPr>
+          <p:cNvPr id="4" name="TextBox 3"/>
+          <p:cNvSpPr txBox="1"/>
+          <p:nvPr/>
+        </p:nvSpPr>
+        <p:spPr>
+          <a:xfrm>
+            <a:off x="640080" y="1078992"/>
+            <a:ext cx="10881360" cy="457200"/>
+          </a:xfrm>
+          <a:prstGeom prst="rect">
+            <a:avLst/>
+          </a:prstGeom>
+          <a:noFill/>
+        </p:spPr>
+        <p:txBody>
+          <a:bodyPr wrap="square">
+            <a:spAutoFit/>
+          </a:bodyPr>
+          <a:lstStyle/>
+          <a:p>
+            <a:pPr algn="l">
+              <a:spcAft>
+                <a:spcPts val="600"/>
+              </a:spcAft>
+            </a:pPr>
+            <a:r>
+              <a:rPr sz="1500" b="0">
+                <a:solidFill>
+                  <a:srgbClr val="5A6672"/>
+                </a:solidFill>
+                <a:latin typeface="맑은 고딕"/>
+              </a:rPr>
+              <a:t>한 단계 더 밀린 명제</a:t>
+            </a:r>
+          </a:p>
+        </p:txBody>
+      </p:sp>
+      <p:sp>
+        <p:nvSpPr>
+          <p:cNvPr id="5" name="TextBox 4"/>
+          <p:cNvSpPr txBox="1"/>
+          <p:nvPr/>
+        </p:nvSpPr>
+        <p:spPr>
+          <a:xfrm>
+            <a:off x="640080" y="1737360"/>
+            <a:ext cx="10881360" cy="4754880"/>
+          </a:xfrm>
+          <a:prstGeom prst="rect">
+            <a:avLst/>
+          </a:prstGeom>
+          <a:noFill/>
+        </p:spPr>
+        <p:txBody>
+          <a:bodyPr wrap="square">
+            <a:spAutoFit/>
+          </a:bodyPr>
+          <a:lstStyle/>
+          <a:p>
+            <a:pPr algn="l">
+              <a:spcAft>
+                <a:spcPts val="1000"/>
+              </a:spcAft>
+            </a:pPr>
+            <a:r>
+              <a:rPr sz="1700" b="0">
+                <a:solidFill>
+                  <a:srgbClr val="222222"/>
+                </a:solidFill>
+                <a:latin typeface="맑은 고딕"/>
+              </a:rPr>
+              <a:t>•  대상의 정적 등록을 지우고 확인하면</a:t>
+            </a:r>
+          </a:p>
+          <a:p>
+            <a:pPr algn="l">
+              <a:spcAft>
+                <a:spcPts val="1000"/>
+              </a:spcAft>
+            </a:pPr>
+            <a:r>
+              <a:rPr sz="1700" b="0">
+                <a:solidFill>
+                  <a:srgbClr val="222222"/>
+                </a:solidFill>
+                <a:latin typeface="맑은 고딕"/>
+              </a:rPr>
+              <a:t>•  `VALIDATE STATIC CONNECT IDENTIFIER` → **`ORA-12514` Failed**</a:t>
+            </a:r>
+          </a:p>
+          <a:p>
+            <a:pPr algn="l">
+              <a:spcAft>
+                <a:spcPts val="1000"/>
+              </a:spcAft>
+            </a:pPr>
+            <a:r>
+              <a:rPr sz="1700" b="0">
+                <a:solidFill>
+                  <a:srgbClr val="222222"/>
+                </a:solidFill>
+                <a:latin typeface="맑은 고딕"/>
+              </a:rPr>
+              <a:t>•  그런데 `VALIDATE DATABASE` → **`Ready for Switchover: Yes`**</a:t>
+            </a:r>
+          </a:p>
+          <a:p>
+            <a:pPr algn="l">
+              <a:spcAft>
+                <a:spcPts val="1000"/>
+              </a:spcAft>
+            </a:pPr>
+            <a:r>
+              <a:rPr sz="1700" b="0">
+                <a:solidFill>
+                  <a:srgbClr val="222222"/>
+                </a:solidFill>
+                <a:latin typeface="맑은 고딕"/>
+              </a:rPr>
+              <a:t>•  `SHOW CONFIGURATION` → **`SUCCESS`**</a:t>
+            </a:r>
+          </a:p>
+        </p:txBody>
+      </p:sp>
+    </p:spTree>
+  </p:cSld>
+  <p:clrMapOvr>
+    <a:masterClrMapping/>
+  </p:clrMapOvr>
+</p:sld>
+</file>
+
+<file path=ppt/slides/slide52.xml><?xml version="1.0" encoding="utf-8"?>
+<p:sld xmlns:a="http://schemas.openxmlformats.org/drawingml/2006/main" xmlns:p="http://schemas.openxmlformats.org/presentationml/2006/main" xmlns:r="http://schemas.openxmlformats.org/officeDocument/2006/relationships">
+  <p:cSld>
+    <p:spTree>
+      <p:nvGrpSpPr>
+        <p:cNvPr id="1" name=""/>
+        <p:cNvGrpSpPr/>
+        <p:nvPr/>
+      </p:nvGrpSpPr>
+      <p:grpSpPr/>
+      <p:sp>
+        <p:nvSpPr>
+          <p:cNvPr id="2" name="Rectangle 1"/>
+          <p:cNvSpPr/>
+          <p:nvPr/>
+        </p:nvSpPr>
+        <p:spPr>
+          <a:xfrm>
+            <a:off x="0" y="0"/>
+            <a:ext cx="12191695" cy="1005840"/>
+          </a:xfrm>
+          <a:prstGeom prst="rect">
+            <a:avLst/>
+          </a:prstGeom>
+          <a:solidFill>
+            <a:srgbClr val="C0392B"/>
+          </a:solidFill>
+          <a:ln>
+            <a:noFill/>
+          </a:ln>
+          <a:effectLst/>
+        </p:spPr>
+        <p:style>
+          <a:lnRef idx="1">
+            <a:schemeClr val="accent1"/>
+          </a:lnRef>
+          <a:fillRef idx="3">
+            <a:schemeClr val="accent1"/>
+          </a:fillRef>
+          <a:effectRef idx="2">
+            <a:schemeClr val="accent1"/>
+          </a:effectRef>
+          <a:fontRef idx="minor">
+            <a:schemeClr val="lt1"/>
+          </a:fontRef>
+        </p:style>
+        <p:txBody>
+          <a:bodyPr rtlCol="0" anchor="ctr"/>
+          <a:lstStyle/>
+          <a:p>
+            <a:pPr algn="ctr"/>
+          </a:p>
+        </p:txBody>
+      </p:sp>
+      <p:sp>
+        <p:nvSpPr>
+          <p:cNvPr id="3" name="TextBox 2"/>
+          <p:cNvSpPr txBox="1"/>
+          <p:nvPr/>
+        </p:nvSpPr>
+        <p:spPr>
+          <a:xfrm>
+            <a:off x="548640" y="91440"/>
+            <a:ext cx="10972800" cy="777240"/>
+          </a:xfrm>
+          <a:prstGeom prst="rect">
+            <a:avLst/>
+          </a:prstGeom>
+          <a:noFill/>
+        </p:spPr>
+        <p:txBody>
+          <a:bodyPr wrap="square">
+            <a:spAutoFit/>
+          </a:bodyPr>
+          <a:lstStyle/>
+          <a:p>
+            <a:pPr algn="l">
+              <a:spcAft>
+                <a:spcPts val="600"/>
+              </a:spcAft>
+            </a:pPr>
+            <a:r>
+              <a:rPr sz="2600" b="1">
+                <a:solidFill>
+                  <a:srgbClr val="FFFFFF"/>
+                </a:solidFill>
+                <a:latin typeface="맑은 고딕"/>
+              </a:rPr>
+              <a:t>Broker 로그</a:t>
+            </a:r>
+          </a:p>
+        </p:txBody>
+      </p:sp>
+      <p:sp>
+        <p:nvSpPr>
+          <p:cNvPr id="4" name="TextBox 3"/>
+          <p:cNvSpPr txBox="1"/>
+          <p:nvPr/>
+        </p:nvSpPr>
+        <p:spPr>
+          <a:xfrm>
+            <a:off x="640080" y="1078992"/>
+            <a:ext cx="10881360" cy="457200"/>
+          </a:xfrm>
+          <a:prstGeom prst="rect">
+            <a:avLst/>
+          </a:prstGeom>
+          <a:noFill/>
+        </p:spPr>
+        <p:txBody>
+          <a:bodyPr wrap="square">
+            <a:spAutoFit/>
+          </a:bodyPr>
+          <a:lstStyle/>
+          <a:p>
+            <a:pPr algn="l">
+              <a:spcAft>
+                <a:spcPts val="600"/>
+              </a:spcAft>
+            </a:pPr>
+            <a:r>
+              <a:rPr sz="1500" b="0">
+                <a:solidFill>
+                  <a:srgbClr val="5A6672"/>
+                </a:solidFill>
+                <a:latin typeface="맑은 고딕"/>
+              </a:rPr>
+              <a:t>drc&lt;DB_UNIQUE_NAME&gt;.log</a:t>
+            </a:r>
+          </a:p>
+        </p:txBody>
+      </p:sp>
+      <p:sp>
+        <p:nvSpPr>
+          <p:cNvPr id="5" name="TextBox 4"/>
+          <p:cNvSpPr txBox="1"/>
+          <p:nvPr/>
+        </p:nvSpPr>
+        <p:spPr>
+          <a:xfrm>
+            <a:off x="640080" y="1737360"/>
+            <a:ext cx="10881360" cy="4754880"/>
+          </a:xfrm>
+          <a:prstGeom prst="rect">
+            <a:avLst/>
+          </a:prstGeom>
+          <a:noFill/>
+        </p:spPr>
+        <p:txBody>
+          <a:bodyPr wrap="square">
+            <a:spAutoFit/>
+          </a:bodyPr>
+          <a:lstStyle/>
+          <a:p>
+            <a:pPr algn="l">
+              <a:spcAft>
+                <a:spcPts val="1000"/>
+              </a:spcAft>
+            </a:pPr>
+            <a:r>
+              <a:rPr sz="1700" b="0">
+                <a:solidFill>
+                  <a:srgbClr val="222222"/>
+                </a:solidFill>
+                <a:latin typeface="맑은 고딕"/>
+              </a:rPr>
+              <a:t>•  위치는 알림 로그와 같은 **ADR 의 trace**</a:t>
+            </a:r>
+          </a:p>
+          <a:p>
+            <a:pPr algn="l">
+              <a:spcAft>
+                <a:spcPts val="1000"/>
+              </a:spcAft>
+            </a:pPr>
+            <a:r>
+              <a:rPr sz="1700" b="0">
+                <a:solidFill>
+                  <a:srgbClr val="222222"/>
+                </a:solidFill>
+                <a:latin typeface="맑은 고딕"/>
+              </a:rPr>
+              <a:t>•  **명령과 결과가 한 쌍**으로 남는다 (`... completed with error ORA-16568`)</a:t>
+            </a:r>
+          </a:p>
+          <a:p>
+            <a:pPr algn="l">
+              <a:spcAft>
+                <a:spcPts val="1000"/>
+              </a:spcAft>
+            </a:pPr>
+            <a:r>
+              <a:rPr sz="1700" b="0">
+                <a:solidFill>
+                  <a:srgbClr val="222222"/>
+                </a:solidFill>
+                <a:latin typeface="맑은 고딕"/>
+              </a:rPr>
+              <a:t>•  화면에 없는 **구성 수준 오류 번호** — `ORA-16607`·`ORA-16608`</a:t>
+            </a:r>
+          </a:p>
+          <a:p>
+            <a:pPr algn="l">
+              <a:spcAft>
+                <a:spcPts val="1000"/>
+              </a:spcAft>
+            </a:pPr>
+            <a:r>
+              <a:rPr sz="1700" b="0">
+                <a:solidFill>
+                  <a:srgbClr val="222222"/>
+                </a:solidFill>
+                <a:latin typeface="맑은 고딕"/>
+              </a:rPr>
+              <a:t>•  정상은 **`ORA-0`**. Broker 가 스스로 실행한 `IncarnationTable` 도 남는다</a:t>
+            </a:r>
+          </a:p>
+        </p:txBody>
+      </p:sp>
+    </p:spTree>
+  </p:cSld>
+  <p:clrMapOvr>
+    <a:masterClrMapping/>
+  </p:clrMapOvr>
+</p:sld>
+</file>
+
+<file path=ppt/slides/slide53.xml><?xml version="1.0" encoding="utf-8"?>
+<p:sld xmlns:a="http://schemas.openxmlformats.org/drawingml/2006/main" xmlns:p="http://schemas.openxmlformats.org/presentationml/2006/main" xmlns:r="http://schemas.openxmlformats.org/officeDocument/2006/relationships">
+  <p:cSld>
+    <p:spTree>
+      <p:nvGrpSpPr>
+        <p:cNvPr id="1" name=""/>
+        <p:cNvGrpSpPr/>
+        <p:nvPr/>
+      </p:nvGrpSpPr>
+      <p:grpSpPr/>
+      <p:sp>
+        <p:nvSpPr>
+          <p:cNvPr id="2" name="Rectangle 1"/>
+          <p:cNvSpPr/>
+          <p:nvPr/>
+        </p:nvSpPr>
+        <p:spPr>
+          <a:xfrm>
+            <a:off x="0" y="0"/>
+            <a:ext cx="12191695" cy="1005840"/>
+          </a:xfrm>
+          <a:prstGeom prst="rect">
+            <a:avLst/>
+          </a:prstGeom>
+          <a:solidFill>
+            <a:srgbClr val="C0392B"/>
+          </a:solidFill>
+          <a:ln>
+            <a:noFill/>
+          </a:ln>
+          <a:effectLst/>
+        </p:spPr>
+        <p:style>
+          <a:lnRef idx="1">
+            <a:schemeClr val="accent1"/>
+          </a:lnRef>
+          <a:fillRef idx="3">
+            <a:schemeClr val="accent1"/>
+          </a:fillRef>
+          <a:effectRef idx="2">
+            <a:schemeClr val="accent1"/>
+          </a:effectRef>
+          <a:fontRef idx="minor">
+            <a:schemeClr val="lt1"/>
+          </a:fontRef>
+        </p:style>
+        <p:txBody>
+          <a:bodyPr rtlCol="0" anchor="ctr"/>
+          <a:lstStyle/>
+          <a:p>
+            <a:pPr algn="ctr"/>
+          </a:p>
+        </p:txBody>
+      </p:sp>
+      <p:sp>
+        <p:nvSpPr>
+          <p:cNvPr id="3" name="TextBox 2"/>
+          <p:cNvSpPr txBox="1"/>
+          <p:nvPr/>
+        </p:nvSpPr>
+        <p:spPr>
+          <a:xfrm>
+            <a:off x="548640" y="91440"/>
+            <a:ext cx="10972800" cy="777240"/>
+          </a:xfrm>
+          <a:prstGeom prst="rect">
+            <a:avLst/>
+          </a:prstGeom>
+          <a:noFill/>
+        </p:spPr>
+        <p:txBody>
+          <a:bodyPr wrap="square">
+            <a:spAutoFit/>
+          </a:bodyPr>
+          <a:lstStyle/>
+          <a:p>
+            <a:pPr algn="l">
+              <a:spcAft>
+                <a:spcPts val="600"/>
+              </a:spcAft>
+            </a:pPr>
+            <a:r>
+              <a:rPr sz="2600" b="1">
+                <a:solidFill>
+                  <a:srgbClr val="FFFFFF"/>
+                </a:solidFill>
+                <a:latin typeface="맑은 고딕"/>
+              </a:rPr>
+              <a:t>요약</a:t>
+            </a:r>
+          </a:p>
+        </p:txBody>
+      </p:sp>
+      <p:sp>
+        <p:nvSpPr>
+          <p:cNvPr id="4" name="TextBox 3"/>
+          <p:cNvSpPr txBox="1"/>
+          <p:nvPr/>
+        </p:nvSpPr>
+        <p:spPr>
+          <a:xfrm>
+            <a:off x="640080" y="1371600"/>
+            <a:ext cx="10881360" cy="5120640"/>
+          </a:xfrm>
+          <a:prstGeom prst="rect">
+            <a:avLst/>
+          </a:prstGeom>
+          <a:noFill/>
+        </p:spPr>
+        <p:txBody>
+          <a:bodyPr wrap="square">
+            <a:spAutoFit/>
+          </a:bodyPr>
+          <a:lstStyle/>
+          <a:p>
+            <a:pPr algn="l">
+              <a:spcAft>
+                <a:spcPts val="1000"/>
+              </a:spcAft>
+            </a:pPr>
+            <a:r>
+              <a:rPr sz="1600" b="0">
+                <a:solidFill>
+                  <a:srgbClr val="222222"/>
+                </a:solidFill>
+                <a:latin typeface="맑은 고딕"/>
+              </a:rPr>
+              <a:t>•  `SHOW` 는 "의도대로인가", `VALIDATE` 는 "전환할 수 있는가"</a:t>
+            </a:r>
+          </a:p>
+          <a:p>
+            <a:pPr algn="l">
+              <a:spcAft>
+                <a:spcPts val="1000"/>
+              </a:spcAft>
+            </a:pPr>
+            <a:r>
+              <a:rPr sz="1600" b="0">
+                <a:solidFill>
+                  <a:srgbClr val="222222"/>
+                </a:solidFill>
+                <a:latin typeface="맑은 고딕"/>
+              </a:rPr>
+              <a:t>•  실측 — `LogShipping=OFF` 인데 `SUCCESS`, 두 지연도 0</a:t>
+            </a:r>
+          </a:p>
+          <a:p>
+            <a:pPr algn="l">
+              <a:spcAft>
+                <a:spcPts val="1000"/>
+              </a:spcAft>
+            </a:pPr>
+            <a:r>
+              <a:rPr sz="1600" b="0">
+                <a:solidFill>
+                  <a:srgbClr val="222222"/>
+                </a:solidFill>
+                <a:latin typeface="맑은 고딕"/>
+              </a:rPr>
+              <a:t>•  Broker 는 `DEFER` 가 아니라 **`RESET`** 을 쓴다</a:t>
+            </a:r>
+          </a:p>
+          <a:p>
+            <a:pPr algn="l">
+              <a:spcAft>
+                <a:spcPts val="1000"/>
+              </a:spcAft>
+            </a:pPr>
+            <a:r>
+              <a:rPr sz="1600" b="0">
+                <a:solidFill>
+                  <a:srgbClr val="222222"/>
+                </a:solidFill>
+                <a:latin typeface="맑은 고딕"/>
+              </a:rPr>
+              <a:t>•  `VERBOSE` 는 `Future` 구성까지 계산한다</a:t>
+            </a:r>
+          </a:p>
+          <a:p>
+            <a:pPr algn="l">
+              <a:spcAft>
+                <a:spcPts val="1000"/>
+              </a:spcAft>
+            </a:pPr>
+            <a:r>
+              <a:rPr sz="1600" b="0">
+                <a:solidFill>
+                  <a:srgbClr val="222222"/>
+                </a:solidFill>
+                <a:latin typeface="맑은 고딕"/>
+              </a:rPr>
+              <a:t>•  임계값 셋은 기본 30초 — ORA-16853·16855·16857</a:t>
+            </a:r>
+          </a:p>
+          <a:p>
+            <a:pPr algn="l">
+              <a:spcAft>
+                <a:spcPts val="1000"/>
+              </a:spcAft>
+            </a:pPr>
+            <a:r>
+              <a:rPr sz="1600" b="0">
+                <a:solidFill>
+                  <a:srgbClr val="222222"/>
+                </a:solidFill>
+                <a:latin typeface="맑은 고딕"/>
+              </a:rPr>
+              <a:t>•  **임계값이 있는 항목만 경보한다**</a:t>
+            </a:r>
+          </a:p>
+          <a:p>
+            <a:pPr algn="l">
+              <a:spcAft>
+                <a:spcPts val="1000"/>
+              </a:spcAft>
+            </a:pPr>
+            <a:r>
+              <a:rPr sz="1600" b="0">
+                <a:solidFill>
+                  <a:srgbClr val="222222"/>
+                </a:solidFill>
+                <a:latin typeface="맑은 고딕"/>
+              </a:rPr>
+              <a:t>•  `EXPORT` 는 trace 디렉터리. 경로를 주면 ORA-16540</a:t>
+            </a:r>
+          </a:p>
+          <a:p>
+            <a:pPr algn="l">
+              <a:spcAft>
+                <a:spcPts val="1000"/>
+              </a:spcAft>
+            </a:pPr>
+            <a:r>
+              <a:rPr sz="1600" b="0">
+                <a:solidFill>
+                  <a:srgbClr val="222222"/>
+                </a:solidFill>
+                <a:latin typeface="맑은 고딕"/>
+              </a:rPr>
+              <a:t>•  `IMPORT` 는 구성이 있으면 ORA-16504</a:t>
+            </a:r>
+          </a:p>
+          <a:p>
+            <a:pPr algn="l">
+              <a:spcAft>
+                <a:spcPts val="1000"/>
+              </a:spcAft>
+            </a:pPr>
+            <a:r>
+              <a:rPr sz="1600" b="0">
+                <a:solidFill>
+                  <a:srgbClr val="222222"/>
+                </a:solidFill>
+                <a:latin typeface="맑은 고딕"/>
+              </a:rPr>
+              <a:t>•  FSFO 는 전제 없이도 경고만 하고 켜진다 (ORA-16827)</a:t>
+            </a:r>
+          </a:p>
+          <a:p>
+            <a:pPr algn="l">
+              <a:spcAft>
+                <a:spcPts val="1000"/>
+              </a:spcAft>
+            </a:pPr>
+            <a:r>
+              <a:rPr sz="1600" b="0">
+                <a:solidFill>
+                  <a:srgbClr val="222222"/>
+                </a:solidFill>
+                <a:latin typeface="맑은 고딕"/>
+              </a:rPr>
+              <a:t>•  끌 때는 **`DISABLE` 이 먼저**</a:t>
+            </a:r>
+          </a:p>
+          <a:p>
+            <a:pPr algn="l">
+              <a:spcAft>
+                <a:spcPts val="1000"/>
+              </a:spcAft>
+            </a:pPr>
+            <a:r>
+              <a:rPr sz="1600" b="0">
+                <a:solidFill>
+                  <a:srgbClr val="222222"/>
+                </a:solidFill>
+                <a:latin typeface="맑은 고딕"/>
+              </a:rPr>
+              <a:t>•  감시 다섯 층 중 **4층을 빠뜨리는 것이 가장 흔한 실수**</a:t>
+            </a:r>
+          </a:p>
+          <a:p>
+            <a:pPr algn="l">
+              <a:spcAft>
+                <a:spcPts val="1000"/>
+              </a:spcAft>
+            </a:pPr>
+            <a:r>
+              <a:rPr sz="1600" b="0">
+                <a:solidFill>
+                  <a:srgbClr val="222222"/>
+                </a:solidFill>
+                <a:latin typeface="맑은 고딕"/>
+              </a:rPr>
+              <a:t>•  `VALIDATE` 는 여섯 구문. **★ `VALIDATE DATABASE` 는 Primary 의 정적 등록만 검사한다**</a:t>
+            </a:r>
+          </a:p>
+          <a:p>
+            <a:pPr algn="l">
+              <a:spcAft>
+                <a:spcPts val="1000"/>
+              </a:spcAft>
+            </a:pPr>
+            <a:r>
+              <a:rPr sz="1600" b="0">
+                <a:solidFill>
+                  <a:srgbClr val="222222"/>
+                </a:solidFill>
+                <a:latin typeface="맑은 고딕"/>
+              </a:rPr>
+              <a:t>•  `drc&lt;이름&gt;.log` 에 명령·결과와 **구성 수준 오류**(ORA-16607·16608)가 남는다</a:t>
+            </a:r>
+          </a:p>
+        </p:txBody>
+      </p:sp>
+    </p:spTree>
+  </p:cSld>
+  <p:clrMapOvr>
+    <a:masterClrMapping/>
+  </p:clrMapOvr>
+</p:sld>
+</file>
+
+<file path=ppt/slides/slide54.xml><?xml version="1.0" encoding="utf-8"?>
+<p:sld xmlns:a="http://schemas.openxmlformats.org/drawingml/2006/main" xmlns:p="http://schemas.openxmlformats.org/presentationml/2006/main" xmlns:r="http://schemas.openxmlformats.org/officeDocument/2006/relationships">
+  <p:cSld>
+    <p:spTree>
+      <p:nvGrpSpPr>
+        <p:cNvPr id="1" name=""/>
+        <p:cNvGrpSpPr/>
+        <p:nvPr/>
+      </p:nvGrpSpPr>
+      <p:grpSpPr/>
+      <p:sp>
+        <p:nvSpPr>
+          <p:cNvPr id="2" name="Rectangle 1"/>
+          <p:cNvSpPr/>
+          <p:nvPr/>
+        </p:nvSpPr>
+        <p:spPr>
+          <a:xfrm>
+            <a:off x="0" y="0"/>
+            <a:ext cx="12191695" cy="1005840"/>
+          </a:xfrm>
+          <a:prstGeom prst="rect">
+            <a:avLst/>
+          </a:prstGeom>
+          <a:solidFill>
+            <a:srgbClr val="C0392B"/>
+          </a:solidFill>
+          <a:ln>
+            <a:noFill/>
+          </a:ln>
+          <a:effectLst/>
+        </p:spPr>
+        <p:style>
+          <a:lnRef idx="1">
+            <a:schemeClr val="accent1"/>
+          </a:lnRef>
+          <a:fillRef idx="3">
+            <a:schemeClr val="accent1"/>
+          </a:fillRef>
+          <a:effectRef idx="2">
+            <a:schemeClr val="accent1"/>
+          </a:effectRef>
+          <a:fontRef idx="minor">
+            <a:schemeClr val="lt1"/>
+          </a:fontRef>
+        </p:style>
+        <p:txBody>
+          <a:bodyPr rtlCol="0" anchor="ctr"/>
+          <a:lstStyle/>
+          <a:p>
+            <a:pPr algn="ctr"/>
+          </a:p>
+        </p:txBody>
+      </p:sp>
+      <p:sp>
+        <p:nvSpPr>
+          <p:cNvPr id="3" name="TextBox 2"/>
+          <p:cNvSpPr txBox="1"/>
+          <p:nvPr/>
+        </p:nvSpPr>
+        <p:spPr>
+          <a:xfrm>
+            <a:off x="548640" y="91440"/>
+            <a:ext cx="10972800" cy="777240"/>
+          </a:xfrm>
+          <a:prstGeom prst="rect">
+            <a:avLst/>
+          </a:prstGeom>
+          <a:noFill/>
+        </p:spPr>
+        <p:txBody>
+          <a:bodyPr wrap="square">
+            <a:spAutoFit/>
+          </a:bodyPr>
+          <a:lstStyle/>
+          <a:p>
+            <a:pPr algn="l">
+              <a:spcAft>
+                <a:spcPts val="600"/>
+              </a:spcAft>
+            </a:pPr>
+            <a:r>
+              <a:rPr sz="2600" b="1">
+                <a:solidFill>
+                  <a:srgbClr val="FFFFFF"/>
+                </a:solidFill>
+                <a:latin typeface="맑은 고딕"/>
+              </a:rPr>
+              <a:t>다음 장 예고</a:t>
+            </a:r>
+          </a:p>
+        </p:txBody>
+      </p:sp>
+      <p:sp>
+        <p:nvSpPr>
+          <p:cNvPr id="4" name="TextBox 3"/>
+          <p:cNvSpPr txBox="1"/>
+          <p:nvPr/>
+        </p:nvSpPr>
+        <p:spPr>
+          <a:xfrm>
+            <a:off x="640080" y="1371600"/>
+            <a:ext cx="10881360" cy="5120640"/>
+          </a:xfrm>
+          <a:prstGeom prst="rect">
+            <a:avLst/>
+          </a:prstGeom>
+          <a:noFill/>
+        </p:spPr>
+        <p:txBody>
+          <a:bodyPr wrap="square">
+            <a:spAutoFit/>
+          </a:bodyPr>
+          <a:lstStyle/>
+          <a:p>
+            <a:pPr algn="l">
+              <a:spcAft>
+                <a:spcPts val="1000"/>
+              </a:spcAft>
+            </a:pPr>
+            <a:r>
+              <a:rPr sz="1600" b="0">
+                <a:solidFill>
+                  <a:srgbClr val="222222"/>
+                </a:solidFill>
+                <a:latin typeface="맑은 고딕"/>
+              </a:rPr>
+              <a:t>•  15장 — V$ 뷰 기반 모니터링과 문제 해결</a:t>
+            </a:r>
+          </a:p>
+          <a:p>
+            <a:pPr algn="l">
+              <a:spcAft>
+                <a:spcPts val="1000"/>
+              </a:spcAft>
+            </a:pPr>
+            <a:r>
+              <a:rPr sz="1600" b="0">
+                <a:solidFill>
+                  <a:srgbClr val="222222"/>
+                </a:solidFill>
+                <a:latin typeface="맑은 고딕"/>
+              </a:rPr>
+              <a:t>•  Broker 없이 SQL 만으로 진단하는 방법</a:t>
+            </a:r>
+          </a:p>
+          <a:p>
+            <a:pPr algn="l">
+              <a:spcAft>
+                <a:spcPts val="1000"/>
+              </a:spcAft>
+            </a:pPr>
+            <a:r>
+              <a:rPr sz="1600" b="0">
+                <a:solidFill>
+                  <a:srgbClr val="222222"/>
+                </a:solidFill>
+                <a:latin typeface="맑은 고딕"/>
+              </a:rPr>
+              <a:t>•  갭·성능·공간 문제의 절차화</a:t>
+            </a:r>
+          </a:p>
+          <a:p>
+            <a:pPr algn="l">
+              <a:spcAft>
+                <a:spcPts val="1000"/>
+              </a:spcAft>
+            </a:pPr>
+            <a:r>
+              <a:rPr sz="1600" b="0">
+                <a:solidFill>
+                  <a:srgbClr val="222222"/>
+                </a:solidFill>
+                <a:latin typeface="맑은 고딕"/>
+              </a:rPr>
+              <a:t>•  이 장에서 본 뷰들을 실제 장애 상황에 적용한다</a:t>
             </a:r>
           </a:p>
         </p:txBody>
